--- a/CIS330 Slideshow.pptx
+++ b/CIS330 Slideshow.pptx
@@ -2,63 +2,62 @@
 <file path=ppt/presentation.xml><?xml version="1.0" encoding="utf-8"?>
 <p:presentation xmlns:a="http://schemas.openxmlformats.org/drawingml/2006/main" xmlns:r="http://schemas.openxmlformats.org/officeDocument/2006/relationships" xmlns:mc="http://schemas.openxmlformats.org/markup-compatibility/2006" xmlns:mv="urn:schemas-microsoft-com:mac:vml" xmlns:p="http://schemas.openxmlformats.org/presentationml/2006/main" xmlns:c="http://schemas.openxmlformats.org/drawingml/2006/chart" xmlns:dgm="http://schemas.openxmlformats.org/drawingml/2006/diagram" xmlns:o="urn:schemas-microsoft-com:office:office" xmlns:v="urn:schemas-microsoft-com:vml" xmlns:pvml="urn:schemas-microsoft-com:office:powerpoint" xmlns:com="http://schemas.openxmlformats.org/drawingml/2006/compatibility" xmlns:p14="http://schemas.microsoft.com/office/powerpoint/2010/main" xmlns:p15="http://schemas.microsoft.com/office/powerpoint/2012/main" xmlns:ahyp="http://schemas.microsoft.com/office/drawing/2018/hyperlinkcolor" autoCompressPictures="0" embedTrueTypeFonts="1" strictFirstAndLastChars="0" saveSubsetFonts="1">
   <p:sldMasterIdLst>
-    <p:sldMasterId id="2147483659" r:id="rId5"/>
+    <p:sldMasterId id="2147483659" r:id="rId4"/>
   </p:sldMasterIdLst>
   <p:notesMasterIdLst>
-    <p:notesMasterId r:id="rId6"/>
+    <p:notesMasterId r:id="rId5"/>
   </p:notesMasterIdLst>
   <p:sldIdLst>
-    <p:sldId id="256" r:id="rId7"/>
-    <p:sldId id="257" r:id="rId8"/>
-    <p:sldId id="258" r:id="rId9"/>
-    <p:sldId id="259" r:id="rId10"/>
-    <p:sldId id="260" r:id="rId11"/>
-    <p:sldId id="261" r:id="rId12"/>
-    <p:sldId id="262" r:id="rId13"/>
-    <p:sldId id="263" r:id="rId14"/>
-    <p:sldId id="264" r:id="rId15"/>
-    <p:sldId id="265" r:id="rId16"/>
-    <p:sldId id="266" r:id="rId17"/>
-    <p:sldId id="267" r:id="rId18"/>
-    <p:sldId id="268" r:id="rId19"/>
-    <p:sldId id="269" r:id="rId20"/>
-    <p:sldId id="270" r:id="rId21"/>
-    <p:sldId id="271" r:id="rId22"/>
-    <p:sldId id="272" r:id="rId23"/>
-    <p:sldId id="273" r:id="rId24"/>
-    <p:sldId id="274" r:id="rId25"/>
-    <p:sldId id="275" r:id="rId26"/>
-    <p:sldId id="276" r:id="rId27"/>
-    <p:sldId id="277" r:id="rId28"/>
-    <p:sldId id="278" r:id="rId29"/>
-    <p:sldId id="279" r:id="rId30"/>
-    <p:sldId id="280" r:id="rId31"/>
-    <p:sldId id="281" r:id="rId32"/>
-    <p:sldId id="282" r:id="rId33"/>
-    <p:sldId id="283" r:id="rId34"/>
-    <p:sldId id="284" r:id="rId35"/>
+    <p:sldId id="256" r:id="rId6"/>
+    <p:sldId id="257" r:id="rId7"/>
+    <p:sldId id="258" r:id="rId8"/>
+    <p:sldId id="259" r:id="rId9"/>
+    <p:sldId id="260" r:id="rId10"/>
+    <p:sldId id="261" r:id="rId11"/>
+    <p:sldId id="262" r:id="rId12"/>
+    <p:sldId id="263" r:id="rId13"/>
+    <p:sldId id="264" r:id="rId14"/>
+    <p:sldId id="265" r:id="rId15"/>
+    <p:sldId id="266" r:id="rId16"/>
+    <p:sldId id="267" r:id="rId17"/>
+    <p:sldId id="268" r:id="rId18"/>
+    <p:sldId id="269" r:id="rId19"/>
+    <p:sldId id="270" r:id="rId20"/>
+    <p:sldId id="271" r:id="rId21"/>
+    <p:sldId id="272" r:id="rId22"/>
+    <p:sldId id="273" r:id="rId23"/>
+    <p:sldId id="274" r:id="rId24"/>
+    <p:sldId id="275" r:id="rId25"/>
+    <p:sldId id="276" r:id="rId26"/>
+    <p:sldId id="277" r:id="rId27"/>
+    <p:sldId id="278" r:id="rId28"/>
+    <p:sldId id="279" r:id="rId29"/>
+    <p:sldId id="280" r:id="rId30"/>
+    <p:sldId id="281" r:id="rId31"/>
+    <p:sldId id="282" r:id="rId32"/>
+    <p:sldId id="283" r:id="rId33"/>
   </p:sldIdLst>
   <p:sldSz cy="5143500" cx="9144000"/>
   <p:notesSz cx="6858000" cy="9144000"/>
   <p:embeddedFontLst>
     <p:embeddedFont>
       <p:font typeface="Playfair Display"/>
-      <p:regular r:id="rId36"/>
-      <p:bold r:id="rId37"/>
-      <p:italic r:id="rId38"/>
-      <p:boldItalic r:id="rId39"/>
+      <p:regular r:id="rId34"/>
+      <p:bold r:id="rId35"/>
+      <p:italic r:id="rId36"/>
+      <p:boldItalic r:id="rId37"/>
     </p:embeddedFont>
     <p:embeddedFont>
       <p:font typeface="Montserrat"/>
-      <p:regular r:id="rId40"/>
-      <p:bold r:id="rId41"/>
-      <p:italic r:id="rId42"/>
-      <p:boldItalic r:id="rId43"/>
+      <p:regular r:id="rId38"/>
+      <p:bold r:id="rId39"/>
+      <p:italic r:id="rId40"/>
+      <p:boldItalic r:id="rId41"/>
     </p:embeddedFont>
     <p:embeddedFont>
       <p:font typeface="Oswald"/>
-      <p:regular r:id="rId44"/>
-      <p:bold r:id="rId45"/>
+      <p:regular r:id="rId42"/>
+      <p:bold r:id="rId43"/>
     </p:embeddedFont>
   </p:embeddedFontLst>
   <p:defaultTextStyle>
@@ -307,21 +306,6 @@
     </p:ext>
   </p:extLst>
 </p:presentation>
-</file>
-
-<file path=ppt/commentAuthors.xml><?xml version="1.0" encoding="utf-8"?>
-<p:cmAuthorLst xmlns:a="http://schemas.openxmlformats.org/drawingml/2006/main" xmlns:r="http://schemas.openxmlformats.org/officeDocument/2006/relationships" xmlns:mc="http://schemas.openxmlformats.org/markup-compatibility/2006" xmlns:mv="urn:schemas-microsoft-com:mac:vml" xmlns:p="http://schemas.openxmlformats.org/presentationml/2006/main" xmlns:c="http://schemas.openxmlformats.org/drawingml/2006/chart" xmlns:dgm="http://schemas.openxmlformats.org/drawingml/2006/diagram" xmlns:o="urn:schemas-microsoft-com:office:office" xmlns:v="urn:schemas-microsoft-com:vml" xmlns:pvml="urn:schemas-microsoft-com:office:powerpoint" xmlns:com="http://schemas.openxmlformats.org/drawingml/2006/compatibility" xmlns:p14="http://schemas.microsoft.com/office/powerpoint/2010/main" xmlns:p15="http://schemas.microsoft.com/office/powerpoint/2012/main" xmlns:ahyp="http://schemas.microsoft.com/office/drawing/2018/hyperlinkcolor">
-  <p:cmAuthor clrIdx="0" id="0" initials="" lastIdx="1" name="Olivia Sharpston"/>
-</p:cmAuthorLst>
-</file>
-
-<file path=ppt/comments/comment1.xml><?xml version="1.0" encoding="utf-8"?>
-<p:cmLst xmlns:a="http://schemas.openxmlformats.org/drawingml/2006/main" xmlns:r="http://schemas.openxmlformats.org/officeDocument/2006/relationships" xmlns:mc="http://schemas.openxmlformats.org/markup-compatibility/2006" xmlns:mv="urn:schemas-microsoft-com:mac:vml" xmlns:p="http://schemas.openxmlformats.org/presentationml/2006/main" xmlns:c="http://schemas.openxmlformats.org/drawingml/2006/chart" xmlns:dgm="http://schemas.openxmlformats.org/drawingml/2006/diagram" xmlns:o="urn:schemas-microsoft-com:office:office" xmlns:v="urn:schemas-microsoft-com:vml" xmlns:pvml="urn:schemas-microsoft-com:office:powerpoint" xmlns:com="http://schemas.openxmlformats.org/drawingml/2006/compatibility" xmlns:p14="http://schemas.microsoft.com/office/powerpoint/2010/main" xmlns:p15="http://schemas.microsoft.com/office/powerpoint/2012/main" xmlns:ahyp="http://schemas.microsoft.com/office/drawing/2018/hyperlinkcolor">
-  <p:cm authorId="0" idx="1" dt="2025-04-30T14:20:15.212">
-    <p:pos x="196" y="777"/>
-    <p:text>need to come up with a reasonable amount</p:text>
-  </p:cm>
-</p:cmLst>
 </file>
 
 <file path=ppt/notesMasters/notesMaster1.xml><?xml version="1.0" encoding="utf-8"?>
@@ -2785,105 +2769,6 @@
       <p:sp>
         <p:nvSpPr>
           <p:cNvPr id="324" name="Google Shape;324;g351eeaf0df8_1_56:notes"/>
-          <p:cNvSpPr txBox="1"/>
-          <p:nvPr>
-            <p:ph idx="1" type="body"/>
-          </p:nvPr>
-        </p:nvSpPr>
-        <p:spPr>
-          <a:xfrm>
-            <a:off x="685800" y="4343400"/>
-            <a:ext cx="5486400" cy="4114800"/>
-          </a:xfrm>
-          <a:prstGeom prst="rect">
-            <a:avLst/>
-          </a:prstGeom>
-        </p:spPr>
-        <p:txBody>
-          <a:bodyPr anchorCtr="0" anchor="t" bIns="91425" lIns="91425" spcFirstLastPara="1" rIns="91425" wrap="square" tIns="91425">
-            <a:noAutofit/>
-          </a:bodyPr>
-          <a:lstStyle/>
-          <a:p>
-            <a:pPr indent="0" lvl="0" marL="0" rtl="0" algn="l">
-              <a:spcBef>
-                <a:spcPts val="0"/>
-              </a:spcBef>
-              <a:spcAft>
-                <a:spcPts val="0"/>
-              </a:spcAft>
-              <a:buNone/>
-            </a:pPr>
-            <a:r>
-              <a:t/>
-            </a:r>
-            <a:endParaRPr/>
-          </a:p>
-        </p:txBody>
-      </p:sp>
-    </p:spTree>
-  </p:cSld>
-  <p:clrMapOvr>
-    <a:masterClrMapping/>
-  </p:clrMapOvr>
-</p:notes>
-</file>
-
-<file path=ppt/notesSlides/notesSlide29.xml><?xml version="1.0" encoding="utf-8"?>
-<p:notes xmlns:a="http://schemas.openxmlformats.org/drawingml/2006/main" xmlns:r="http://schemas.openxmlformats.org/officeDocument/2006/relationships" xmlns:mc="http://schemas.openxmlformats.org/markup-compatibility/2006" xmlns:mv="urn:schemas-microsoft-com:mac:vml" xmlns:p="http://schemas.openxmlformats.org/presentationml/2006/main" xmlns:c="http://schemas.openxmlformats.org/drawingml/2006/chart" xmlns:dgm="http://schemas.openxmlformats.org/drawingml/2006/diagram" xmlns:o="urn:schemas-microsoft-com:office:office" xmlns:v="urn:schemas-microsoft-com:vml" xmlns:pvml="urn:schemas-microsoft-com:office:powerpoint" xmlns:com="http://schemas.openxmlformats.org/drawingml/2006/compatibility" xmlns:p14="http://schemas.microsoft.com/office/powerpoint/2010/main" xmlns:p15="http://schemas.microsoft.com/office/powerpoint/2012/main" xmlns:ahyp="http://schemas.microsoft.com/office/drawing/2018/hyperlinkcolor" showMasterPhAnim="0" showMasterSp="0">
-  <p:cSld>
-    <p:spTree>
-      <p:nvGrpSpPr>
-        <p:cNvPr id="331" name="Shape 331"/>
-        <p:cNvGrpSpPr/>
-        <p:nvPr/>
-      </p:nvGrpSpPr>
-      <p:grpSpPr>
-        <a:xfrm>
-          <a:off x="0" y="0"/>
-          <a:ext cx="0" cy="0"/>
-          <a:chOff x="0" y="0"/>
-          <a:chExt cx="0" cy="0"/>
-        </a:xfrm>
-      </p:grpSpPr>
-      <p:sp>
-        <p:nvSpPr>
-          <p:cNvPr id="332" name="Google Shape;332;g351eeaf0df8_1_199:notes"/>
-          <p:cNvSpPr/>
-          <p:nvPr>
-            <p:ph idx="2" type="sldImg"/>
-          </p:nvPr>
-        </p:nvSpPr>
-        <p:spPr>
-          <a:xfrm>
-            <a:off x="381300" y="685800"/>
-            <a:ext cx="6096000" cy="3429000"/>
-          </a:xfrm>
-          <a:custGeom>
-            <a:rect b="b" l="l" r="r" t="t"/>
-            <a:pathLst>
-              <a:path extrusionOk="0" h="120000" w="120000">
-                <a:moveTo>
-                  <a:pt x="0" y="0"/>
-                </a:moveTo>
-                <a:lnTo>
-                  <a:pt x="120000" y="0"/>
-                </a:lnTo>
-                <a:lnTo>
-                  <a:pt x="120000" y="120000"/>
-                </a:lnTo>
-                <a:lnTo>
-                  <a:pt x="0" y="120000"/>
-                </a:lnTo>
-                <a:close/>
-              </a:path>
-            </a:pathLst>
-          </a:custGeom>
-        </p:spPr>
-      </p:sp>
-      <p:sp>
-        <p:nvSpPr>
-          <p:cNvPr id="333" name="Google Shape;333;g351eeaf0df8_1_199:notes"/>
           <p:cNvSpPr txBox="1"/>
           <p:nvPr>
             <p:ph idx="1" type="body"/>
@@ -15090,51 +14975,7 @@
             </a:pPr>
             <a:r>
               <a:rPr lang="en" sz="1900"/>
-              <a:t>Lesson Learned: </a:t>
-            </a:r>
-            <a:r>
-              <a:rPr lang="en" sz="1900"/>
-              <a:t>(everyone include one)</a:t>
-            </a:r>
-            <a:endParaRPr sz="1900"/>
-          </a:p>
-          <a:p>
-            <a:pPr indent="-349250" lvl="0" marL="457200" rtl="0" algn="l">
-              <a:lnSpc>
-                <a:spcPct val="105000"/>
-              </a:lnSpc>
-              <a:spcBef>
-                <a:spcPts val="0"/>
-              </a:spcBef>
-              <a:spcAft>
-                <a:spcPts val="0"/>
-              </a:spcAft>
-              <a:buSzPts val="1900"/>
-              <a:buChar char="●"/>
-            </a:pPr>
-            <a:r>
-              <a:rPr lang="en" sz="1900"/>
               <a:t>Lesson Learned: It is important to get user feedback throughout the process so that improvements can be made for user satisfaction.</a:t>
-            </a:r>
-            <a:endParaRPr sz="1900"/>
-          </a:p>
-          <a:p>
-            <a:pPr indent="-349250" lvl="0" marL="457200" rtl="0" algn="l">
-              <a:lnSpc>
-                <a:spcPct val="105000"/>
-              </a:lnSpc>
-              <a:spcBef>
-                <a:spcPts val="0"/>
-              </a:spcBef>
-              <a:spcAft>
-                <a:spcPts val="0"/>
-              </a:spcAft>
-              <a:buSzPts val="1900"/>
-              <a:buChar char="●"/>
-            </a:pPr>
-            <a:r>
-              <a:rPr lang="en" sz="1900"/>
-              <a:t>Lesson Learned: </a:t>
             </a:r>
             <a:endParaRPr sz="1900"/>
           </a:p>
@@ -15246,224 +15087,6 @@
               <a:t>Olivia Sharpston, Christian Miller, Nolen Robinson, Jacobe Johnson</a:t>
             </a:r>
             <a:endParaRPr sz="1300"/>
-          </a:p>
-        </p:txBody>
-      </p:sp>
-    </p:spTree>
-  </p:cSld>
-  <p:clrMapOvr>
-    <a:masterClrMapping/>
-  </p:clrMapOvr>
-</p:sld>
-</file>
-
-<file path=ppt/slides/slide29.xml><?xml version="1.0" encoding="utf-8"?>
-<p:sld xmlns:a="http://schemas.openxmlformats.org/drawingml/2006/main" xmlns:r="http://schemas.openxmlformats.org/officeDocument/2006/relationships" xmlns:mc="http://schemas.openxmlformats.org/markup-compatibility/2006" xmlns:mv="urn:schemas-microsoft-com:mac:vml" xmlns:p="http://schemas.openxmlformats.org/presentationml/2006/main" xmlns:c="http://schemas.openxmlformats.org/drawingml/2006/chart" xmlns:dgm="http://schemas.openxmlformats.org/drawingml/2006/diagram" xmlns:o="urn:schemas-microsoft-com:office:office" xmlns:v="urn:schemas-microsoft-com:vml" xmlns:pvml="urn:schemas-microsoft-com:office:powerpoint" xmlns:com="http://schemas.openxmlformats.org/drawingml/2006/compatibility" xmlns:p14="http://schemas.microsoft.com/office/powerpoint/2010/main" xmlns:p15="http://schemas.microsoft.com/office/powerpoint/2012/main" xmlns:ahyp="http://schemas.microsoft.com/office/drawing/2018/hyperlinkcolor">
-  <p:cSld>
-    <p:spTree>
-      <p:nvGrpSpPr>
-        <p:cNvPr id="334" name="Shape 334"/>
-        <p:cNvGrpSpPr/>
-        <p:nvPr/>
-      </p:nvGrpSpPr>
-      <p:grpSpPr>
-        <a:xfrm>
-          <a:off x="0" y="0"/>
-          <a:ext cx="0" cy="0"/>
-          <a:chOff x="0" y="0"/>
-          <a:chExt cx="0" cy="0"/>
-        </a:xfrm>
-      </p:grpSpPr>
-      <p:sp>
-        <p:nvSpPr>
-          <p:cNvPr id="335" name="Google Shape;335;p41"/>
-          <p:cNvSpPr txBox="1"/>
-          <p:nvPr>
-            <p:ph idx="1" type="body"/>
-          </p:nvPr>
-        </p:nvSpPr>
-        <p:spPr>
-          <a:xfrm>
-            <a:off x="311700" y="1649800"/>
-            <a:ext cx="8520600" cy="2919000"/>
-          </a:xfrm>
-          <a:prstGeom prst="rect">
-            <a:avLst/>
-          </a:prstGeom>
-        </p:spPr>
-        <p:txBody>
-          <a:bodyPr anchorCtr="0" anchor="t" bIns="91425" lIns="91425" spcFirstLastPara="1" rIns="91425" wrap="square" tIns="91425">
-            <a:normAutofit/>
-          </a:bodyPr>
-          <a:lstStyle/>
-          <a:p>
-            <a:pPr indent="-374650" lvl="0" marL="457200" rtl="0" algn="l">
-              <a:spcBef>
-                <a:spcPts val="0"/>
-              </a:spcBef>
-              <a:spcAft>
-                <a:spcPts val="0"/>
-              </a:spcAft>
-              <a:buSzPts val="2300"/>
-              <a:buChar char="●"/>
-            </a:pPr>
-            <a:r>
-              <a:rPr b="1" lang="en" sz="1900"/>
-              <a:t>THIS IS A TEMPLATE SLIDE. BE SURE TO DELETE BEFORE TURNING IN.</a:t>
-            </a:r>
-            <a:endParaRPr b="1" sz="1900"/>
-          </a:p>
-        </p:txBody>
-      </p:sp>
-      <p:pic>
-        <p:nvPicPr>
-          <p:cNvPr id="336" name="Google Shape;336;p41" title="UNA-Logo-Long-Gold-White-web.png"/>
-          <p:cNvPicPr preferRelativeResize="0"/>
-          <p:nvPr/>
-        </p:nvPicPr>
-        <p:blipFill>
-          <a:blip r:embed="rId3">
-            <a:alphaModFix/>
-          </a:blip>
-          <a:stretch>
-            <a:fillRect/>
-          </a:stretch>
-        </p:blipFill>
-        <p:spPr>
-          <a:xfrm>
-            <a:off x="152400" y="152404"/>
-            <a:ext cx="4940749" cy="1013250"/>
-          </a:xfrm>
-          <a:prstGeom prst="rect">
-            <a:avLst/>
-          </a:prstGeom>
-          <a:noFill/>
-          <a:ln>
-            <a:noFill/>
-          </a:ln>
-        </p:spPr>
-      </p:pic>
-      <p:sp>
-        <p:nvSpPr>
-          <p:cNvPr id="337" name="Google Shape;337;p41"/>
-          <p:cNvSpPr txBox="1"/>
-          <p:nvPr>
-            <p:ph idx="12" type="sldNum"/>
-          </p:nvPr>
-        </p:nvSpPr>
-        <p:spPr>
-          <a:xfrm>
-            <a:off x="8497999" y="4688759"/>
-            <a:ext cx="548700" cy="393600"/>
-          </a:xfrm>
-          <a:prstGeom prst="rect">
-            <a:avLst/>
-          </a:prstGeom>
-        </p:spPr>
-        <p:txBody>
-          <a:bodyPr anchorCtr="0" anchor="ctr" bIns="91425" lIns="91425" spcFirstLastPara="1" rIns="91425" wrap="square" tIns="91425">
-            <a:normAutofit/>
-          </a:bodyPr>
-          <a:lstStyle/>
-          <a:p>
-            <a:pPr indent="0" lvl="0" marL="0" rtl="0" algn="r">
-              <a:spcBef>
-                <a:spcPts val="0"/>
-              </a:spcBef>
-              <a:spcAft>
-                <a:spcPts val="0"/>
-              </a:spcAft>
-              <a:buNone/>
-            </a:pPr>
-            <a:fld id="{00000000-1234-1234-1234-123412341234}" type="slidenum">
-              <a:rPr lang="en"/>
-              <a:t>‹#›</a:t>
-            </a:fld>
-            <a:endParaRPr/>
-          </a:p>
-        </p:txBody>
-      </p:sp>
-      <p:sp>
-        <p:nvSpPr>
-          <p:cNvPr id="338" name="Google Shape;338;p41"/>
-          <p:cNvSpPr txBox="1"/>
-          <p:nvPr>
-            <p:ph type="title"/>
-          </p:nvPr>
-        </p:nvSpPr>
-        <p:spPr>
-          <a:xfrm>
-            <a:off x="0" y="4827800"/>
-            <a:ext cx="4157400" cy="393600"/>
-          </a:xfrm>
-          <a:prstGeom prst="rect">
-            <a:avLst/>
-          </a:prstGeom>
-        </p:spPr>
-        <p:txBody>
-          <a:bodyPr anchorCtr="0" anchor="t" bIns="91425" lIns="91425" spcFirstLastPara="1" rIns="91425" wrap="square" tIns="91425">
-            <a:noAutofit/>
-          </a:bodyPr>
-          <a:lstStyle/>
-          <a:p>
-            <a:pPr indent="0" lvl="0" marL="0" rtl="0" algn="l">
-              <a:spcBef>
-                <a:spcPts val="0"/>
-              </a:spcBef>
-              <a:spcAft>
-                <a:spcPts val="0"/>
-              </a:spcAft>
-              <a:buSzPts val="990"/>
-              <a:buNone/>
-            </a:pPr>
-            <a:r>
-              <a:rPr lang="en" sz="1300"/>
-              <a:t>Olivia Sharpston, Christian Miller, Nolen Robinson, Jacobe Johnson</a:t>
-            </a:r>
-            <a:endParaRPr sz="1300"/>
-          </a:p>
-        </p:txBody>
-      </p:sp>
-      <p:sp>
-        <p:nvSpPr>
-          <p:cNvPr id="339" name="Google Shape;339;p41"/>
-          <p:cNvSpPr txBox="1"/>
-          <p:nvPr>
-            <p:ph type="title"/>
-          </p:nvPr>
-        </p:nvSpPr>
-        <p:spPr>
-          <a:xfrm>
-            <a:off x="6355850" y="592950"/>
-            <a:ext cx="1852500" cy="572700"/>
-          </a:xfrm>
-          <a:prstGeom prst="rect">
-            <a:avLst/>
-          </a:prstGeom>
-        </p:spPr>
-        <p:txBody>
-          <a:bodyPr anchorCtr="0" anchor="t" bIns="91425" lIns="91425" spcFirstLastPara="1" rIns="91425" wrap="square" tIns="91425">
-            <a:noAutofit/>
-          </a:bodyPr>
-          <a:lstStyle/>
-          <a:p>
-            <a:pPr indent="0" lvl="0" marL="0" rtl="0" algn="l">
-              <a:lnSpc>
-                <a:spcPct val="115000"/>
-              </a:lnSpc>
-              <a:spcBef>
-                <a:spcPts val="0"/>
-              </a:spcBef>
-              <a:spcAft>
-                <a:spcPts val="1200"/>
-              </a:spcAft>
-              <a:buNone/>
-            </a:pPr>
-            <a:r>
-              <a:rPr lang="en" sz="2700"/>
-              <a:t>TITLE</a:t>
-            </a:r>
-            <a:endParaRPr sz="2700"/>
           </a:p>
         </p:txBody>
       </p:sp>
@@ -16649,31 +16272,14 @@
               <a:spcAft>
                 <a:spcPts val="0"/>
               </a:spcAft>
-              <a:buClr>
-                <a:schemeClr val="dk2"/>
-              </a:buClr>
               <a:buSzPts val="1900"/>
               <a:buChar char="○"/>
             </a:pPr>
             <a:r>
-              <a:rPr lang="en" sz="1900">
-                <a:solidFill>
-                  <a:schemeClr val="dk2"/>
-                </a:solidFill>
-                <a:highlight>
-                  <a:srgbClr val="FFFF00"/>
-                </a:highlight>
-              </a:rPr>
+              <a:rPr lang="en" sz="1900"/>
               <a:t>Shall not cost for than $ 20,000 U.S. dollars to dispose</a:t>
             </a:r>
-            <a:endParaRPr sz="1900">
-              <a:solidFill>
-                <a:schemeClr val="dk2"/>
-              </a:solidFill>
-              <a:highlight>
-                <a:srgbClr val="FFFF00"/>
-              </a:highlight>
-            </a:endParaRPr>
+            <a:endParaRPr sz="1900"/>
           </a:p>
           <a:p>
             <a:pPr indent="-349250" lvl="0" marL="457200" rtl="0" algn="l">
@@ -16735,7 +16341,7 @@
           <p:nvPr/>
         </p:nvPicPr>
         <p:blipFill>
-          <a:blip r:embed="rId4">
+          <a:blip r:embed="rId3">
             <a:alphaModFix/>
           </a:blip>
           <a:stretch>
@@ -17619,7 +17225,7 @@
             </a:r>
             <a:r>
               <a:rPr lang="en" sz="2100"/>
-              <a:t> he use cases and who is involved to be seen. Furthermore, this enhances the understand of how each actor </a:t>
+              <a:t> the use cases and who is involved to be seen. Furthermore, this enhances the understand of how each actor </a:t>
             </a:r>
             <a:r>
               <a:rPr lang="en" sz="2100"/>
